--- a/material/Python/13_모듈.pptx
+++ b/material/Python/13_모듈.pptx
@@ -1,6 +1,6 @@
 
 <file path=ppt/presentation.xml><?xml version="1.0" encoding="utf-8"?>
-<p:presentation xmlns:a="http://schemas.openxmlformats.org/drawingml/2006/main" xmlns:r="http://schemas.openxmlformats.org/officeDocument/2006/relationships" xmlns:p="http://schemas.openxmlformats.org/presentationml/2006/main" saveSubsetFonts="1">
+<p:presentation xmlns:a="http://schemas.openxmlformats.org/drawingml/2006/main" xmlns:r="http://schemas.openxmlformats.org/officeDocument/2006/relationships" xmlns:p="http://schemas.openxmlformats.org/presentationml/2006/main" embedTrueTypeFonts="1" saveSubsetFonts="1">
   <p:sldMasterIdLst>
     <p:sldMasterId id="2147483660" r:id="rId1"/>
   </p:sldMasterIdLst>
@@ -50,6 +50,29 @@
   </p:sldIdLst>
   <p:sldSz cx="12192000" cy="6858000"/>
   <p:notesSz cx="6858000" cy="9144000"/>
+  <p:embeddedFontLst>
+    <p:embeddedFont>
+      <p:font typeface="G마켓 산스 TTF Bold" panose="02000000000000000000" pitchFamily="2" charset="-127"/>
+      <p:bold r:id="rId42"/>
+    </p:embeddedFont>
+    <p:embeddedFont>
+      <p:font typeface="Pretendard Black" panose="02000A03000000020004" pitchFamily="2" charset="-127"/>
+      <p:bold r:id="rId43"/>
+    </p:embeddedFont>
+    <p:embeddedFont>
+      <p:font typeface="Pretendard Light" panose="02000403000000020004" pitchFamily="2" charset="-127"/>
+      <p:regular r:id="rId44"/>
+    </p:embeddedFont>
+    <p:embeddedFont>
+      <p:font typeface="Pretendard Medium" panose="02000603000000020004" pitchFamily="2" charset="-127"/>
+      <p:regular r:id="rId45"/>
+    </p:embeddedFont>
+    <p:embeddedFont>
+      <p:font typeface="메이플스토리" panose="02000300000000000000" pitchFamily="2" charset="-127"/>
+      <p:regular r:id="rId46"/>
+      <p:bold r:id="rId47"/>
+    </p:embeddedFont>
+  </p:embeddedFontLst>
   <p:defaultTextStyle>
     <a:defPPr>
       <a:defRPr lang="ko-KR"/>
@@ -256,7 +279,7 @@
             <a:fld id="{A13A867C-D490-40C2-AB8D-A60FA70A9BF5}" type="datetimeFigureOut">
               <a:rPr lang="ko-KR" altLang="en-US" smtClean="0"/>
               <a:pPr/>
-              <a:t>2025-07-28</a:t>
+              <a:t>2025-08-21</a:t>
             </a:fld>
             <a:endParaRPr lang="ko-KR" altLang="en-US" dirty="0"/>
           </a:p>
@@ -1895,7 +1918,7 @@
           <a:p>
             <a:fld id="{442BEE3F-2E9A-4FD8-8B8A-8619F3E161C0}" type="datetime1">
               <a:rPr lang="ko-KR" altLang="en-US" smtClean="0"/>
-              <a:t>2025-07-28</a:t>
+              <a:t>2025-08-21</a:t>
             </a:fld>
             <a:endParaRPr lang="ko-KR" altLang="en-US"/>
           </a:p>
@@ -2182,7 +2205,7 @@
           <a:p>
             <a:fld id="{0F78D9C4-20C1-4B15-A116-16DC77AD9A1E}" type="datetime1">
               <a:rPr lang="ko-KR" altLang="en-US" smtClean="0"/>
-              <a:t>2025-07-28</a:t>
+              <a:t>2025-08-21</a:t>
             </a:fld>
             <a:endParaRPr lang="ko-KR" altLang="en-US"/>
           </a:p>
@@ -2357,7 +2380,7 @@
           <a:p>
             <a:fld id="{7F5E23C3-0E3D-4E4E-8486-D7FB4C073DC1}" type="datetime1">
               <a:rPr lang="ko-KR" altLang="en-US" smtClean="0"/>
-              <a:t>2025-07-28</a:t>
+              <a:t>2025-08-21</a:t>
             </a:fld>
             <a:endParaRPr lang="ko-KR" altLang="en-US"/>
           </a:p>
@@ -2769,7 +2792,7 @@
           <a:p>
             <a:fld id="{051A8C49-CED7-4A86-9B4A-621D7F62EE92}" type="datetime1">
               <a:rPr lang="ko-KR" altLang="en-US" smtClean="0"/>
-              <a:t>2025-07-28</a:t>
+              <a:t>2025-08-21</a:t>
             </a:fld>
             <a:endParaRPr lang="ko-KR" altLang="en-US"/>
           </a:p>
@@ -3098,7 +3121,7 @@
           <a:p>
             <a:fld id="{7F5E23C3-0E3D-4E4E-8486-D7FB4C073DC1}" type="datetime1">
               <a:rPr lang="ko-KR" altLang="en-US" smtClean="0"/>
-              <a:t>2025-07-28</a:t>
+              <a:t>2025-08-21</a:t>
             </a:fld>
             <a:endParaRPr lang="ko-KR" altLang="en-US"/>
           </a:p>
@@ -4141,7 +4164,7 @@
           <a:p>
             <a:fld id="{0F78D9C4-20C1-4B15-A116-16DC77AD9A1E}" type="datetime1">
               <a:rPr lang="ko-KR" altLang="en-US" smtClean="0"/>
-              <a:t>2025-07-28</a:t>
+              <a:t>2025-08-21</a:t>
             </a:fld>
             <a:endParaRPr lang="ko-KR" altLang="en-US"/>
           </a:p>
@@ -4430,7 +4453,7 @@
           <a:p>
             <a:fld id="{0F78D9C4-20C1-4B15-A116-16DC77AD9A1E}" type="datetime1">
               <a:rPr lang="ko-KR" altLang="en-US" smtClean="0"/>
-              <a:t>2025-07-28</a:t>
+              <a:t>2025-08-21</a:t>
             </a:fld>
             <a:endParaRPr lang="ko-KR" altLang="en-US"/>
           </a:p>
@@ -4599,7 +4622,7 @@
           <a:p>
             <a:fld id="{0F78D9C4-20C1-4B15-A116-16DC77AD9A1E}" type="datetime1">
               <a:rPr lang="ko-KR" altLang="en-US" smtClean="0"/>
-              <a:t>2025-07-28</a:t>
+              <a:t>2025-08-21</a:t>
             </a:fld>
             <a:endParaRPr lang="ko-KR" altLang="en-US"/>
           </a:p>
@@ -4980,7 +5003,7 @@
           <a:p>
             <a:fld id="{0F78D9C4-20C1-4B15-A116-16DC77AD9A1E}" type="datetime1">
               <a:rPr lang="ko-KR" altLang="en-US" smtClean="0"/>
-              <a:t>2025-07-28</a:t>
+              <a:t>2025-08-21</a:t>
             </a:fld>
             <a:endParaRPr lang="ko-KR" altLang="en-US"/>
           </a:p>
@@ -6865,7 +6888,7 @@
           <a:p>
             <a:fld id="{0F78D9C4-20C1-4B15-A116-16DC77AD9A1E}" type="datetime1">
               <a:rPr lang="ko-KR" altLang="en-US" smtClean="0"/>
-              <a:t>2025-07-28</a:t>
+              <a:t>2025-08-21</a:t>
             </a:fld>
             <a:endParaRPr lang="ko-KR" altLang="en-US" dirty="0"/>
           </a:p>
@@ -8774,7 +8797,7 @@
           <a:p>
             <a:fld id="{0F78D9C4-20C1-4B15-A116-16DC77AD9A1E}" type="datetime1">
               <a:rPr lang="ko-KR" altLang="en-US" smtClean="0"/>
-              <a:t>2025-07-28</a:t>
+              <a:t>2025-08-21</a:t>
             </a:fld>
             <a:endParaRPr lang="ko-KR" altLang="en-US"/>
           </a:p>
@@ -9242,7 +9265,7 @@
           <a:p>
             <a:fld id="{0F78D9C4-20C1-4B15-A116-16DC77AD9A1E}" type="datetime1">
               <a:rPr lang="ko-KR" altLang="en-US" smtClean="0"/>
-              <a:t>2025-07-28</a:t>
+              <a:t>2025-08-21</a:t>
             </a:fld>
             <a:endParaRPr lang="ko-KR" altLang="en-US"/>
           </a:p>
@@ -9427,7 +9450,7 @@
           <a:p>
             <a:fld id="{0F78D9C4-20C1-4B15-A116-16DC77AD9A1E}" type="datetime1">
               <a:rPr lang="ko-KR" altLang="en-US" smtClean="0"/>
-              <a:t>2025-07-28</a:t>
+              <a:t>2025-08-21</a:t>
             </a:fld>
             <a:endParaRPr lang="ko-KR" altLang="en-US"/>
           </a:p>
@@ -11317,7 +11340,7 @@
           <a:p>
             <a:fld id="{0F78D9C4-20C1-4B15-A116-16DC77AD9A1E}" type="datetime1">
               <a:rPr lang="ko-KR" altLang="en-US" smtClean="0"/>
-              <a:t>2025-07-28</a:t>
+              <a:t>2025-08-21</a:t>
             </a:fld>
             <a:endParaRPr lang="ko-KR" altLang="en-US"/>
           </a:p>
@@ -11807,7 +11830,7 @@
           <a:p>
             <a:fld id="{0F78D9C4-20C1-4B15-A116-16DC77AD9A1E}" type="datetime1">
               <a:rPr lang="ko-KR" altLang="en-US" smtClean="0"/>
-              <a:t>2025-07-28</a:t>
+              <a:t>2025-08-21</a:t>
             </a:fld>
             <a:endParaRPr lang="ko-KR" altLang="en-US"/>
           </a:p>
@@ -11909,7 +11932,7 @@
           <a:p>
             <a:fld id="{0F78D9C4-20C1-4B15-A116-16DC77AD9A1E}" type="datetime1">
               <a:rPr lang="ko-KR" altLang="en-US" smtClean="0"/>
-              <a:t>2025-07-28</a:t>
+              <a:t>2025-08-21</a:t>
             </a:fld>
             <a:endParaRPr lang="ko-KR" altLang="en-US"/>
           </a:p>
@@ -14339,7 +14362,7 @@
           <a:p>
             <a:fld id="{0F78D9C4-20C1-4B15-A116-16DC77AD9A1E}" type="datetime1">
               <a:rPr lang="ko-KR" altLang="en-US" smtClean="0"/>
-              <a:t>2025-07-28</a:t>
+              <a:t>2025-08-21</a:t>
             </a:fld>
             <a:endParaRPr lang="ko-KR" altLang="en-US"/>
           </a:p>
@@ -16277,7 +16300,7 @@
           <a:p>
             <a:fld id="{0F78D9C4-20C1-4B15-A116-16DC77AD9A1E}" type="datetime1">
               <a:rPr lang="ko-KR" altLang="en-US" smtClean="0"/>
-              <a:t>2025-07-28</a:t>
+              <a:t>2025-08-21</a:t>
             </a:fld>
             <a:endParaRPr lang="ko-KR" altLang="en-US"/>
           </a:p>
@@ -16383,7 +16406,7 @@
           <a:p>
             <a:fld id="{0F78D9C4-20C1-4B15-A116-16DC77AD9A1E}" type="datetime1">
               <a:rPr lang="ko-KR" altLang="en-US" smtClean="0"/>
-              <a:t>2025-07-28</a:t>
+              <a:t>2025-08-21</a:t>
             </a:fld>
             <a:endParaRPr lang="ko-KR" altLang="en-US"/>
           </a:p>
@@ -17935,7 +17958,7 @@
           <a:p>
             <a:fld id="{0F78D9C4-20C1-4B15-A116-16DC77AD9A1E}" type="datetime1">
               <a:rPr lang="ko-KR" altLang="en-US" smtClean="0"/>
-              <a:t>2025-07-28</a:t>
+              <a:t>2025-08-21</a:t>
             </a:fld>
             <a:endParaRPr lang="ko-KR" altLang="en-US"/>
           </a:p>
@@ -18588,7 +18611,7 @@
           <a:p>
             <a:fld id="{0F78D9C4-20C1-4B15-A116-16DC77AD9A1E}" type="datetime1">
               <a:rPr lang="ko-KR" altLang="en-US" smtClean="0"/>
-              <a:t>2025-07-28</a:t>
+              <a:t>2025-08-21</a:t>
             </a:fld>
             <a:endParaRPr lang="ko-KR" altLang="en-US"/>
           </a:p>
@@ -18865,7 +18888,7 @@
           <a:p>
             <a:fld id="{0F78D9C4-20C1-4B15-A116-16DC77AD9A1E}" type="datetime1">
               <a:rPr lang="ko-KR" altLang="en-US" smtClean="0"/>
-              <a:t>2025-07-28</a:t>
+              <a:t>2025-08-21</a:t>
             </a:fld>
             <a:endParaRPr lang="ko-KR" altLang="en-US"/>
           </a:p>
@@ -19159,7 +19182,7 @@
           <a:p>
             <a:fld id="{0F78D9C4-20C1-4B15-A116-16DC77AD9A1E}" type="datetime1">
               <a:rPr lang="ko-KR" altLang="en-US" smtClean="0"/>
-              <a:t>2025-07-28</a:t>
+              <a:t>2025-08-21</a:t>
             </a:fld>
             <a:endParaRPr lang="ko-KR" altLang="en-US"/>
           </a:p>
@@ -21886,7 +21909,7 @@
           <a:p>
             <a:fld id="{0F78D9C4-20C1-4B15-A116-16DC77AD9A1E}" type="datetime1">
               <a:rPr lang="ko-KR" altLang="en-US" smtClean="0"/>
-              <a:t>2025-07-28</a:t>
+              <a:t>2025-08-21</a:t>
             </a:fld>
             <a:endParaRPr lang="ko-KR" altLang="en-US"/>
           </a:p>
@@ -24301,7 +24324,7 @@
           <a:p>
             <a:fld id="{0F78D9C4-20C1-4B15-A116-16DC77AD9A1E}" type="datetime1">
               <a:rPr lang="ko-KR" altLang="en-US" smtClean="0"/>
-              <a:t>2025-07-28</a:t>
+              <a:t>2025-08-21</a:t>
             </a:fld>
             <a:endParaRPr lang="ko-KR" altLang="en-US"/>
           </a:p>
@@ -24682,7 +24705,7 @@
           <a:p>
             <a:fld id="{0F78D9C4-20C1-4B15-A116-16DC77AD9A1E}" type="datetime1">
               <a:rPr lang="ko-KR" altLang="en-US" smtClean="0"/>
-              <a:t>2025-07-28</a:t>
+              <a:t>2025-08-21</a:t>
             </a:fld>
             <a:endParaRPr lang="ko-KR" altLang="en-US"/>
           </a:p>
@@ -24809,7 +24832,7 @@
           <a:p>
             <a:fld id="{0F78D9C4-20C1-4B15-A116-16DC77AD9A1E}" type="datetime1">
               <a:rPr lang="ko-KR" altLang="en-US" smtClean="0"/>
-              <a:t>2025-07-28</a:t>
+              <a:t>2025-08-21</a:t>
             </a:fld>
             <a:endParaRPr lang="ko-KR" altLang="en-US"/>
           </a:p>
@@ -25049,7 +25072,7 @@
           <a:p>
             <a:fld id="{0F78D9C4-20C1-4B15-A116-16DC77AD9A1E}" type="datetime1">
               <a:rPr lang="ko-KR" altLang="en-US" smtClean="0"/>
-              <a:t>2025-07-28</a:t>
+              <a:t>2025-08-21</a:t>
             </a:fld>
             <a:endParaRPr lang="ko-KR" altLang="en-US"/>
           </a:p>
@@ -25318,7 +25341,7 @@
           <a:p>
             <a:fld id="{0F78D9C4-20C1-4B15-A116-16DC77AD9A1E}" type="datetime1">
               <a:rPr lang="ko-KR" altLang="en-US" smtClean="0"/>
-              <a:t>2025-07-28</a:t>
+              <a:t>2025-08-21</a:t>
             </a:fld>
             <a:endParaRPr lang="ko-KR" altLang="en-US"/>
           </a:p>
@@ -25647,7 +25670,7 @@
           <a:p>
             <a:fld id="{0F78D9C4-20C1-4B15-A116-16DC77AD9A1E}" type="datetime1">
               <a:rPr lang="ko-KR" altLang="en-US" smtClean="0"/>
-              <a:t>2025-07-28</a:t>
+              <a:t>2025-08-21</a:t>
             </a:fld>
             <a:endParaRPr lang="ko-KR" altLang="en-US"/>
           </a:p>
